--- a/итог/546.pptx
+++ b/итог/546.pptx
@@ -4001,6 +4001,9 @@
           </a:bodyPr>
           <a:lstStyle/>
           <a:p>
+            <a:pPr marL="0" indent="0">
+              <a:buNone/>
+            </a:pPr>
             <a:r>
               <a:rPr lang="ru-RU" dirty="0"/>
               <a:t>ЧТО Я НАУЧИЛСЯ ЗА ВРЕМЯ ПРАКТИКИ</a:t>
@@ -4037,6 +4040,9 @@
             </a:r>
           </a:p>
           <a:p>
+            <a:pPr marL="0" indent="0">
+              <a:buNone/>
+            </a:pPr>
             <a:r>
               <a:rPr lang="ru-RU" dirty="0"/>
               <a:t>Что сделано:</a:t>
@@ -4716,10 +4722,10 @@
             </a:r>
           </a:p>
           <a:p>
-            <a:r>
-              <a:rPr lang="ru-RU" dirty="0"/>
-              <a:t>   ↓</a:t>
-            </a:r>
+            <a:pPr marL="0" indent="0">
+              <a:buNone/>
+            </a:pPr>
+            <a:endParaRPr lang="ru-RU" dirty="0"/>
           </a:p>
           <a:p>
             <a:r>
@@ -4728,10 +4734,7 @@
             </a:r>
           </a:p>
           <a:p>
-            <a:r>
-              <a:rPr lang="ru-RU" dirty="0"/>
-              <a:t>   ↓</a:t>
-            </a:r>
+            <a:endParaRPr lang="ru-RU" dirty="0"/>
           </a:p>
           <a:p>
             <a:r>
@@ -4740,10 +4743,7 @@
             </a:r>
           </a:p>
           <a:p>
-            <a:r>
-              <a:rPr lang="ru-RU" dirty="0"/>
-              <a:t>   ↓</a:t>
-            </a:r>
+            <a:endParaRPr lang="ru-RU" dirty="0"/>
           </a:p>
           <a:p>
             <a:r>
@@ -4752,10 +4752,7 @@
             </a:r>
           </a:p>
           <a:p>
-            <a:r>
-              <a:rPr lang="ru-RU" dirty="0"/>
-              <a:t>   ↓</a:t>
-            </a:r>
+            <a:endParaRPr lang="ru-RU" dirty="0"/>
           </a:p>
           <a:p>
             <a:r>
@@ -4764,10 +4761,7 @@
             </a:r>
           </a:p>
           <a:p>
-            <a:r>
-              <a:rPr lang="ru-RU" dirty="0"/>
-              <a:t>   ↓</a:t>
-            </a:r>
+            <a:endParaRPr lang="ru-RU" dirty="0"/>
           </a:p>
           <a:p>
             <a:r>
@@ -4776,10 +4770,7 @@
             </a:r>
           </a:p>
           <a:p>
-            <a:r>
-              <a:rPr lang="ru-RU" dirty="0"/>
-              <a:t>   ↓</a:t>
-            </a:r>
+            <a:endParaRPr lang="ru-RU" dirty="0"/>
           </a:p>
           <a:p>
             <a:r>
@@ -4842,7 +4833,7 @@
           <a:p>
             <a:r>
               <a:rPr lang="ru-RU" dirty="0"/>
-              <a:t>ВЫДЕЛЕННЫЕ СУЩНОСТИ (11 таблиц)</a:t>
+              <a:t>ВЫДЕЛЕННЫЕ СУЩНОСТИ</a:t>
             </a:r>
           </a:p>
         </p:txBody>
